--- a/public/fun/pack/pptx/talkpro/발표템플릿프리미엄_38_업무보고_퓨터실버.pptx
+++ b/public/fun/pack/pptx/talkpro/발표템플릿프리미엄_38_업무보고_퓨터실버.pptx
@@ -115,12 +115,12 @@
   <p:extLst>
     <p:ext uri="{521415D9-36F7-43E2-AB2F-B90AF26B5E84}">
       <p14:sectionLst xmlns:p14="http://schemas.microsoft.com/office/powerpoint/2010/main">
-        <p14:section name="시작" id="{A0ECDE5B-76CE-4CCC-8075-78630C541070}">
+        <p14:section name="시작" id="{241D3BE3-0706-4A6B-8E2D-682F95D043FF}">
           <p14:sldIdLst>
             <p14:sldId id="256"/>
           </p14:sldIdLst>
         </p14:section>
-        <p14:section name="본문" id="{7FBEBDD5-26D0-4BD2-A75A-7074B7A25EE4}">
+        <p14:section name="본문" id="{282537A8-D071-4B25-BF64-689A8A3A620E}">
           <p14:sldIdLst>
             <p14:sldId id="257"/>
             <p14:sldId id="258"/>
@@ -131,7 +131,7 @@
             <p14:sldId id="263"/>
           </p14:sldIdLst>
         </p14:section>
-        <p14:section name="마무리" id="{50E40589-0CAE-41C0-A635-54D1AF054308}">
+        <p14:section name="마무리" id="{F540E5D6-1088-4760-89F5-0DC7BE478710}">
           <p14:sldIdLst>
             <p14:sldId id="264"/>
           </p14:sldIdLst>
@@ -2019,7 +2019,7 @@
             </a:lvl1pPr>
           </a:lstStyle>
           <a:p>
-            <a:fld id="{600DDCE6-F256-453D-A210-85C741DCCFA8}" type="slidenum">
+            <a:fld id="{6A000F46-5B8D-481E-8123-AC75D1DA2729}" type="slidenum">
               <a:rPr lang="en-US"/>
               <a:t>‹#›</a:t>
             </a:fld>
@@ -2777,7 +2777,7 @@
             </a:lvl1pPr>
           </a:lstStyle>
           <a:p>
-            <a:fld id="{458D038D-1979-4670-AC84-71BEF0AC8819}" type="slidenum">
+            <a:fld id="{67EBFE74-D37D-40B8-8E21-A1521E58B619}" type="slidenum">
               <a:rPr lang="en-US"/>
               <a:t>‹#›</a:t>
             </a:fld>
@@ -3414,7 +3414,7 @@
             </a:lvl1pPr>
           </a:lstStyle>
           <a:p>
-            <a:fld id="{165F594C-B34D-4C12-A3BE-8F38679AC7AD}" type="slidenum">
+            <a:fld id="{C2FC61D3-4BF3-4A9C-A6AE-3FC05990657E}" type="slidenum">
               <a:rPr lang="en-US"/>
               <a:t>‹#›</a:t>
             </a:fld>
@@ -4281,7 +4281,7 @@
           <a:p>
             <a:r>
               <a:rPr lang="ko-KR"/>
-              <a:t>0000. 00. 00</a:t>
+              <a:t>날짜 입력</a:t>
             </a:r>
           </a:p>
         </p:txBody>
@@ -4366,7 +4366,7 @@
           <a:bodyPr/>
           <a:lstStyle/>
           <a:p>
-            <a:fld id="{2F7A6B89-DBCB-4FCE-A3AF-CC5EF5AB976B}" type="slidenum">
+            <a:fld id="{59D8C720-3A2D-42E8-BCF4-F48FF3BFED62}" type="slidenum">
               <a:rPr lang="en-US"/>
               <a:t>‹#›</a:t>
             </a:fld>
@@ -5468,7 +5468,7 @@
           <a:bodyPr/>
           <a:lstStyle/>
           <a:p>
-            <a:fld id="{62CDC6A5-4F2C-484F-A345-31EEA61774A4}" type="slidenum">
+            <a:fld id="{E512EB63-F30C-44F2-AC8F-8581008AD7F0}" type="slidenum">
               <a:rPr lang="en-US"/>
               <a:t>‹#›</a:t>
             </a:fld>
@@ -5556,7 +5556,7 @@
           <a:bodyPr/>
           <a:lstStyle/>
           <a:p>
-            <a:fld id="{AA64A9D1-6575-4181-A46D-D7FD9D904E55}" type="slidenum">
+            <a:fld id="{EC594C90-CB8F-4F28-9CE6-3A91CB99FCFC}" type="slidenum">
               <a:rPr lang="en-US"/>
               <a:t>‹#›</a:t>
             </a:fld>
@@ -6454,7 +6454,7 @@
           <a:bodyPr/>
           <a:lstStyle/>
           <a:p>
-            <a:fld id="{53FD81B1-7F4C-4AE8-896B-0D891BF00814}" type="slidenum">
+            <a:fld id="{33846FD0-C3BE-4B43-B461-7F506B26AAB1}" type="slidenum">
               <a:rPr lang="en-US"/>
               <a:t>‹#›</a:t>
             </a:fld>
@@ -7058,7 +7058,7 @@
           <a:bodyPr/>
           <a:lstStyle/>
           <a:p>
-            <a:fld id="{03613603-B863-4440-B7B6-47EA06807A5D}" type="slidenum">
+            <a:fld id="{C6D0E3A3-C453-462A-880A-0D4FBB717183}" type="slidenum">
               <a:rPr lang="en-US"/>
               <a:t>‹#›</a:t>
             </a:fld>
@@ -7241,7 +7241,7 @@
           <a:bodyPr/>
           <a:lstStyle/>
           <a:p>
-            <a:fld id="{5173745C-D3D6-48AD-B1A9-6CAF0DC4946C}" type="slidenum">
+            <a:fld id="{8A2E4226-E656-4863-8582-B50C79DC9B75}" type="slidenum">
               <a:rPr lang="en-US"/>
               <a:t>‹#›</a:t>
             </a:fld>
@@ -8305,7 +8305,7 @@
           <a:bodyPr/>
           <a:lstStyle/>
           <a:p>
-            <a:fld id="{E2025D5D-5427-41BA-95CB-003174AC6F4E}" type="slidenum">
+            <a:fld id="{39C73888-C9CA-407B-9BB5-575F0B6A8DD8}" type="slidenum">
               <a:rPr lang="en-US"/>
               <a:t>‹#›</a:t>
             </a:fld>
